--- a/공공기관 생성형 AI 과정/session2/PublicOffice_GenAI_Practice_Round.pptx
+++ b/공공기관 생성형 AI 과정/session2/PublicOffice_GenAI_Practice_Round.pptx
@@ -2305,7 +2305,7 @@
                 <a:ea typeface="Noto Sans CJK KR" pitchFamily="34" charset="-122"/>
                 <a:cs typeface="Noto Sans CJK KR" pitchFamily="34" charset="-120"/>
               </a:rPr>
-              <a:t>공공기관 생성형 AI 업무혁신 · 중급 연습 과제 · 90분</a:t>
+              <a:t>공공기관 생성형 AI 업무혁신 · 중급 연습 과제</a:t>
             </a:r>
             <a:endParaRPr lang="en-US" sz="1800" dirty="0"/>
           </a:p>
@@ -3414,7 +3414,7 @@
                 <a:ea typeface="Noto Sans CJK KR" pitchFamily="34" charset="-122"/>
                 <a:cs typeface="Noto Sans CJK KR" pitchFamily="34" charset="-120"/>
               </a:rPr>
-              <a:t>01:10–01:30 · 확인 질문 — 세 안이 수량만 다른 같은 안은 아닙니까?</a:t>
+              <a:t>확인 질문 — 세 안이 수량만 다른 같은 안은 아닙니까?</a:t>
             </a:r>
             <a:endParaRPr lang="en-US" sz="2100" dirty="0"/>
           </a:p>
@@ -4717,7 +4717,7 @@
                 <a:ea typeface="Noto Sans CJK KR" pitchFamily="34" charset="-122"/>
                 <a:cs typeface="Noto Sans CJK KR" pitchFamily="34" charset="-120"/>
               </a:rPr>
-              <a:t>01:30–01:50 · 확인 질문 — 세 형식의 같은 항목 숫자가 전부 같습니까?</a:t>
+              <a:t>확인 질문 — 세 형식의 같은 항목 숫자가 전부 같습니까?</a:t>
             </a:r>
             <a:endParaRPr lang="en-US" sz="2100" dirty="0"/>
           </a:p>
@@ -4985,7 +4985,7 @@
         <p:spPr>
           <a:xfrm>
             <a:off x="658368" y="2084832"/>
-            <a:ext cx="2103120" cy="329184"/>
+            <a:ext cx="2377440" cy="329184"/>
           </a:xfrm>
           <a:prstGeom prst="rect">
             <a:avLst/>
@@ -5023,8 +5023,8 @@
         </p:nvSpPr>
         <p:spPr>
           <a:xfrm>
-            <a:off x="2761488" y="2084832"/>
-            <a:ext cx="1005840" cy="329184"/>
+            <a:off x="3035808" y="2084832"/>
+            <a:ext cx="4206240" cy="329184"/>
           </a:xfrm>
           <a:prstGeom prst="rect">
             <a:avLst/>
@@ -5048,7 +5048,7 @@
                 <a:ea typeface="Noto Sans CJK KR" pitchFamily="34" charset="-122"/>
                 <a:cs typeface="Noto Sans CJK KR" pitchFamily="34" charset="-120"/>
               </a:rPr>
-              <a:t>시간</a:t>
+              <a:t>제출물</a:t>
             </a:r>
             <a:endParaRPr lang="en-US" sz="1300" dirty="0"/>
           </a:p>
@@ -5062,8 +5062,8 @@
         </p:nvSpPr>
         <p:spPr>
           <a:xfrm>
-            <a:off x="3767328" y="2084832"/>
-            <a:ext cx="3931920" cy="329184"/>
+            <a:off x="7242048" y="2084832"/>
+            <a:ext cx="4197096" cy="329184"/>
           </a:xfrm>
           <a:prstGeom prst="rect">
             <a:avLst/>
@@ -5087,7 +5087,7 @@
                 <a:ea typeface="Noto Sans CJK KR" pitchFamily="34" charset="-122"/>
                 <a:cs typeface="Noto Sans CJK KR" pitchFamily="34" charset="-120"/>
               </a:rPr>
-              <a:t>제출물</a:t>
+              <a:t>스스로 답할 질문</a:t>
             </a:r>
             <a:endParaRPr lang="en-US" sz="1300" dirty="0"/>
           </a:p>
@@ -5101,24 +5101,63 @@
         </p:nvSpPr>
         <p:spPr>
           <a:xfrm>
-            <a:off x="7699248" y="2084832"/>
-            <a:ext cx="3739896" cy="329184"/>
-          </a:xfrm>
-          <a:prstGeom prst="rect">
-            <a:avLst/>
-          </a:prstGeom>
-          <a:noFill/>
-          <a:ln/>
-        </p:spPr>
-        <p:txBody>
-          <a:bodyPr wrap="square" rtlCol="0" anchor="ctr"/>
-          <a:lstStyle/>
-          <a:p>
-            <a:pPr indent="0" marL="0">
-              <a:buNone/>
-            </a:pPr>
-            <a:r>
-              <a:rPr lang="en-US" sz="1300" dirty="0">
+            <a:off x="658368" y="2542032"/>
+            <a:ext cx="2377440" cy="438912"/>
+          </a:xfrm>
+          <a:prstGeom prst="rect">
+            <a:avLst/>
+          </a:prstGeom>
+          <a:noFill/>
+          <a:ln/>
+        </p:spPr>
+        <p:txBody>
+          <a:bodyPr wrap="square" rtlCol="0" anchor="ctr"/>
+          <a:lstStyle/>
+          <a:p>
+            <a:pPr indent="0" marL="0">
+              <a:buNone/>
+            </a:pPr>
+            <a:r>
+              <a:rPr lang="en-US" sz="1900" b="1" dirty="0">
+                <a:solidFill>
+                  <a:srgbClr val="102027"/>
+                </a:solidFill>
+                <a:latin typeface="Noto Sans CJK KR" pitchFamily="34" charset="0"/>
+                <a:ea typeface="Noto Sans CJK KR" pitchFamily="34" charset="-122"/>
+                <a:cs typeface="Noto Sans CJK KR" pitchFamily="34" charset="-120"/>
+              </a:rPr>
+              <a:t>1 · 계획·정제</a:t>
+            </a:r>
+            <a:endParaRPr lang="en-US" sz="1900" dirty="0"/>
+          </a:p>
+        </p:txBody>
+      </p:sp>
+      <p:sp>
+        <p:nvSpPr>
+          <p:cNvPr id="12" name="Text 10"/>
+          <p:cNvSpPr/>
+          <p:nvPr/>
+        </p:nvSpPr>
+        <p:spPr>
+          <a:xfrm>
+            <a:off x="3035808" y="2542032"/>
+            <a:ext cx="4206240" cy="438912"/>
+          </a:xfrm>
+          <a:prstGeom prst="rect">
+            <a:avLst/>
+          </a:prstGeom>
+          <a:noFill/>
+          <a:ln/>
+        </p:spPr>
+        <p:txBody>
+          <a:bodyPr wrap="square" rtlCol="0" anchor="ctr"/>
+          <a:lstStyle/>
+          <a:p>
+            <a:pPr indent="0" marL="0">
+              <a:buNone/>
+            </a:pPr>
+            <a:r>
+              <a:rPr lang="en-US" sz="2000" b="1" dirty="0">
                 <a:solidFill>
                   <a:srgbClr val="64757D"/>
                 </a:solidFill>
@@ -5126,48 +5165,9 @@
                 <a:ea typeface="Noto Sans CJK KR" pitchFamily="34" charset="-122"/>
                 <a:cs typeface="Noto Sans CJK KR" pitchFamily="34" charset="-120"/>
               </a:rPr>
-              <a:t>스스로 답할 질문</a:t>
-            </a:r>
-            <a:endParaRPr lang="en-US" sz="1300" dirty="0"/>
-          </a:p>
-        </p:txBody>
-      </p:sp>
-      <p:sp>
-        <p:nvSpPr>
-          <p:cNvPr id="12" name="Text 10"/>
-          <p:cNvSpPr/>
-          <p:nvPr/>
-        </p:nvSpPr>
-        <p:spPr>
-          <a:xfrm>
-            <a:off x="658368" y="2542032"/>
-            <a:ext cx="2103120" cy="438912"/>
-          </a:xfrm>
-          <a:prstGeom prst="rect">
-            <a:avLst/>
-          </a:prstGeom>
-          <a:noFill/>
-          <a:ln/>
-        </p:spPr>
-        <p:txBody>
-          <a:bodyPr wrap="square" rtlCol="0" anchor="ctr"/>
-          <a:lstStyle/>
-          <a:p>
-            <a:pPr indent="0" marL="0">
-              <a:buNone/>
-            </a:pPr>
-            <a:r>
-              <a:rPr lang="en-US" sz="1900" b="1" dirty="0">
-                <a:solidFill>
-                  <a:srgbClr val="102027"/>
-                </a:solidFill>
-                <a:latin typeface="Noto Sans CJK KR" pitchFamily="34" charset="0"/>
-                <a:ea typeface="Noto Sans CJK KR" pitchFamily="34" charset="-122"/>
-                <a:cs typeface="Noto Sans CJK KR" pitchFamily="34" charset="-120"/>
-              </a:rPr>
-              <a:t>1 · 계획·정제</a:t>
-            </a:r>
-            <a:endParaRPr lang="en-US" sz="1900" dirty="0"/>
+              <a:t>PLAN · 품질보고서 · 정제본</a:t>
+            </a:r>
+            <a:endParaRPr lang="en-US" sz="2000" dirty="0"/>
           </a:p>
         </p:txBody>
       </p:sp>
@@ -5179,8 +5179,8 @@
         </p:nvSpPr>
         <p:spPr>
           <a:xfrm>
-            <a:off x="2761488" y="2542032"/>
-            <a:ext cx="1005840" cy="438912"/>
+            <a:off x="7242048" y="2542032"/>
+            <a:ext cx="4197096" cy="438912"/>
           </a:xfrm>
           <a:prstGeom prst="rect">
             <a:avLst/>
@@ -5204,7 +5204,7 @@
                 <a:ea typeface="Noto Sans CJK KR" pitchFamily="34" charset="-122"/>
                 <a:cs typeface="Noto Sans CJK KR" pitchFamily="34" charset="-120"/>
               </a:rPr>
-              <a:t>25분</a:t>
+              <a:t>몇 행이 왜 빠졌습니까</a:t>
             </a:r>
             <a:endParaRPr lang="en-US" sz="2000" dirty="0"/>
           </a:p>
@@ -5212,85 +5212,7 @@
       </p:sp>
       <p:sp>
         <p:nvSpPr>
-          <p:cNvPr id="14" name="Text 12"/>
-          <p:cNvSpPr/>
-          <p:nvPr/>
-        </p:nvSpPr>
-        <p:spPr>
-          <a:xfrm>
-            <a:off x="3767328" y="2542032"/>
-            <a:ext cx="3931920" cy="438912"/>
-          </a:xfrm>
-          <a:prstGeom prst="rect">
-            <a:avLst/>
-          </a:prstGeom>
-          <a:noFill/>
-          <a:ln/>
-        </p:spPr>
-        <p:txBody>
-          <a:bodyPr wrap="square" rtlCol="0" anchor="ctr"/>
-          <a:lstStyle/>
-          <a:p>
-            <a:pPr indent="0" marL="0">
-              <a:buNone/>
-            </a:pPr>
-            <a:r>
-              <a:rPr lang="en-US" sz="2000" b="1" dirty="0">
-                <a:solidFill>
-                  <a:srgbClr val="64757D"/>
-                </a:solidFill>
-                <a:latin typeface="Noto Sans CJK KR" pitchFamily="34" charset="0"/>
-                <a:ea typeface="Noto Sans CJK KR" pitchFamily="34" charset="-122"/>
-                <a:cs typeface="Noto Sans CJK KR" pitchFamily="34" charset="-120"/>
-              </a:rPr>
-              <a:t>PLAN · 품질보고서 · 정제본</a:t>
-            </a:r>
-            <a:endParaRPr lang="en-US" sz="2000" dirty="0"/>
-          </a:p>
-        </p:txBody>
-      </p:sp>
-      <p:sp>
-        <p:nvSpPr>
-          <p:cNvPr id="15" name="Text 13"/>
-          <p:cNvSpPr/>
-          <p:nvPr/>
-        </p:nvSpPr>
-        <p:spPr>
-          <a:xfrm>
-            <a:off x="7699248" y="2542032"/>
-            <a:ext cx="3739896" cy="438912"/>
-          </a:xfrm>
-          <a:prstGeom prst="rect">
-            <a:avLst/>
-          </a:prstGeom>
-          <a:noFill/>
-          <a:ln/>
-        </p:spPr>
-        <p:txBody>
-          <a:bodyPr wrap="square" rtlCol="0" anchor="ctr"/>
-          <a:lstStyle/>
-          <a:p>
-            <a:pPr indent="0" marL="0">
-              <a:buNone/>
-            </a:pPr>
-            <a:r>
-              <a:rPr lang="en-US" sz="2000" b="1" dirty="0">
-                <a:solidFill>
-                  <a:srgbClr val="64757D"/>
-                </a:solidFill>
-                <a:latin typeface="Noto Sans CJK KR" pitchFamily="34" charset="0"/>
-                <a:ea typeface="Noto Sans CJK KR" pitchFamily="34" charset="-122"/>
-                <a:cs typeface="Noto Sans CJK KR" pitchFamily="34" charset="-120"/>
-              </a:rPr>
-              <a:t>몇 행이 왜 빠졌습니까</a:t>
-            </a:r>
-            <a:endParaRPr lang="en-US" sz="2000" dirty="0"/>
-          </a:p>
-        </p:txBody>
-      </p:sp>
-      <p:sp>
-        <p:nvSpPr>
-          <p:cNvPr id="16" name="Shape 14"/>
+          <p:cNvPr id="14" name="Shape 12"/>
           <p:cNvSpPr/>
           <p:nvPr/>
         </p:nvSpPr>
@@ -5313,53 +5235,92 @@
       </p:sp>
       <p:sp>
         <p:nvSpPr>
+          <p:cNvPr id="15" name="Text 13"/>
+          <p:cNvSpPr/>
+          <p:nvPr/>
+        </p:nvSpPr>
+        <p:spPr>
+          <a:xfrm>
+            <a:off x="658368" y="3163824"/>
+            <a:ext cx="2377440" cy="438912"/>
+          </a:xfrm>
+          <a:prstGeom prst="rect">
+            <a:avLst/>
+          </a:prstGeom>
+          <a:noFill/>
+          <a:ln/>
+        </p:spPr>
+        <p:txBody>
+          <a:bodyPr wrap="square" rtlCol="0" anchor="ctr"/>
+          <a:lstStyle/>
+          <a:p>
+            <a:pPr indent="0" marL="0">
+              <a:buNone/>
+            </a:pPr>
+            <a:r>
+              <a:rPr lang="en-US" sz="1900" b="1" dirty="0">
+                <a:solidFill>
+                  <a:srgbClr val="102027"/>
+                </a:solidFill>
+                <a:latin typeface="Noto Sans CJK KR" pitchFamily="34" charset="0"/>
+                <a:ea typeface="Noto Sans CJK KR" pitchFamily="34" charset="-122"/>
+                <a:cs typeface="Noto Sans CJK KR" pitchFamily="34" charset="-120"/>
+              </a:rPr>
+              <a:t>2 · 분류·지표</a:t>
+            </a:r>
+            <a:endParaRPr lang="en-US" sz="1900" dirty="0"/>
+          </a:p>
+        </p:txBody>
+      </p:sp>
+      <p:sp>
+        <p:nvSpPr>
+          <p:cNvPr id="16" name="Text 14"/>
+          <p:cNvSpPr/>
+          <p:nvPr/>
+        </p:nvSpPr>
+        <p:spPr>
+          <a:xfrm>
+            <a:off x="3035808" y="3163824"/>
+            <a:ext cx="4206240" cy="438912"/>
+          </a:xfrm>
+          <a:prstGeom prst="rect">
+            <a:avLst/>
+          </a:prstGeom>
+          <a:noFill/>
+          <a:ln/>
+        </p:spPr>
+        <p:txBody>
+          <a:bodyPr wrap="square" rtlCol="0" anchor="ctr"/>
+          <a:lstStyle/>
+          <a:p>
+            <a:pPr indent="0" marL="0">
+              <a:buNone/>
+            </a:pPr>
+            <a:r>
+              <a:rPr lang="en-US" sz="2000" b="1" dirty="0">
+                <a:solidFill>
+                  <a:srgbClr val="64757D"/>
+                </a:solidFill>
+                <a:latin typeface="Noto Sans CJK KR" pitchFamily="34" charset="0"/>
+                <a:ea typeface="Noto Sans CJK KR" pitchFamily="34" charset="-122"/>
+                <a:cs typeface="Noto Sans CJK KR" pitchFamily="34" charset="-120"/>
+              </a:rPr>
+              <a:t>분류 규칙 · 분류표 · KPI</a:t>
+            </a:r>
+            <a:endParaRPr lang="en-US" sz="2000" dirty="0"/>
+          </a:p>
+        </p:txBody>
+      </p:sp>
+      <p:sp>
+        <p:nvSpPr>
           <p:cNvPr id="17" name="Text 15"/>
           <p:cNvSpPr/>
           <p:nvPr/>
         </p:nvSpPr>
         <p:spPr>
           <a:xfrm>
-            <a:off x="658368" y="3163824"/>
-            <a:ext cx="2103120" cy="438912"/>
-          </a:xfrm>
-          <a:prstGeom prst="rect">
-            <a:avLst/>
-          </a:prstGeom>
-          <a:noFill/>
-          <a:ln/>
-        </p:spPr>
-        <p:txBody>
-          <a:bodyPr wrap="square" rtlCol="0" anchor="ctr"/>
-          <a:lstStyle/>
-          <a:p>
-            <a:pPr indent="0" marL="0">
-              <a:buNone/>
-            </a:pPr>
-            <a:r>
-              <a:rPr lang="en-US" sz="1900" b="1" dirty="0">
-                <a:solidFill>
-                  <a:srgbClr val="102027"/>
-                </a:solidFill>
-                <a:latin typeface="Noto Sans CJK KR" pitchFamily="34" charset="0"/>
-                <a:ea typeface="Noto Sans CJK KR" pitchFamily="34" charset="-122"/>
-                <a:cs typeface="Noto Sans CJK KR" pitchFamily="34" charset="-120"/>
-              </a:rPr>
-              <a:t>2 · 분류·지표</a:t>
-            </a:r>
-            <a:endParaRPr lang="en-US" sz="1900" dirty="0"/>
-          </a:p>
-        </p:txBody>
-      </p:sp>
-      <p:sp>
-        <p:nvSpPr>
-          <p:cNvPr id="18" name="Text 16"/>
-          <p:cNvSpPr/>
-          <p:nvPr/>
-        </p:nvSpPr>
-        <p:spPr>
-          <a:xfrm>
-            <a:off x="2761488" y="3163824"/>
-            <a:ext cx="1005840" cy="438912"/>
+            <a:off x="7242048" y="3163824"/>
+            <a:ext cx="4197096" cy="438912"/>
           </a:xfrm>
           <a:prstGeom prst="rect">
             <a:avLst/>
@@ -5383,7 +5344,7 @@
                 <a:ea typeface="Noto Sans CJK KR" pitchFamily="34" charset="-122"/>
                 <a:cs typeface="Noto Sans CJK KR" pitchFamily="34" charset="-120"/>
               </a:rPr>
-              <a:t>25분</a:t>
+              <a:t>분모를 바꾸면 1위가 바뀝니까</a:t>
             </a:r>
             <a:endParaRPr lang="en-US" sz="2000" dirty="0"/>
           </a:p>
@@ -5391,85 +5352,7 @@
       </p:sp>
       <p:sp>
         <p:nvSpPr>
-          <p:cNvPr id="19" name="Text 17"/>
-          <p:cNvSpPr/>
-          <p:nvPr/>
-        </p:nvSpPr>
-        <p:spPr>
-          <a:xfrm>
-            <a:off x="3767328" y="3163824"/>
-            <a:ext cx="3931920" cy="438912"/>
-          </a:xfrm>
-          <a:prstGeom prst="rect">
-            <a:avLst/>
-          </a:prstGeom>
-          <a:noFill/>
-          <a:ln/>
-        </p:spPr>
-        <p:txBody>
-          <a:bodyPr wrap="square" rtlCol="0" anchor="ctr"/>
-          <a:lstStyle/>
-          <a:p>
-            <a:pPr indent="0" marL="0">
-              <a:buNone/>
-            </a:pPr>
-            <a:r>
-              <a:rPr lang="en-US" sz="2000" b="1" dirty="0">
-                <a:solidFill>
-                  <a:srgbClr val="64757D"/>
-                </a:solidFill>
-                <a:latin typeface="Noto Sans CJK KR" pitchFamily="34" charset="0"/>
-                <a:ea typeface="Noto Sans CJK KR" pitchFamily="34" charset="-122"/>
-                <a:cs typeface="Noto Sans CJK KR" pitchFamily="34" charset="-120"/>
-              </a:rPr>
-              <a:t>분류 규칙 · 분류표 · KPI</a:t>
-            </a:r>
-            <a:endParaRPr lang="en-US" sz="2000" dirty="0"/>
-          </a:p>
-        </p:txBody>
-      </p:sp>
-      <p:sp>
-        <p:nvSpPr>
-          <p:cNvPr id="20" name="Text 18"/>
-          <p:cNvSpPr/>
-          <p:nvPr/>
-        </p:nvSpPr>
-        <p:spPr>
-          <a:xfrm>
-            <a:off x="7699248" y="3163824"/>
-            <a:ext cx="3739896" cy="438912"/>
-          </a:xfrm>
-          <a:prstGeom prst="rect">
-            <a:avLst/>
-          </a:prstGeom>
-          <a:noFill/>
-          <a:ln/>
-        </p:spPr>
-        <p:txBody>
-          <a:bodyPr wrap="square" rtlCol="0" anchor="ctr"/>
-          <a:lstStyle/>
-          <a:p>
-            <a:pPr indent="0" marL="0">
-              <a:buNone/>
-            </a:pPr>
-            <a:r>
-              <a:rPr lang="en-US" sz="1900" b="1" dirty="0">
-                <a:solidFill>
-                  <a:srgbClr val="64757D"/>
-                </a:solidFill>
-                <a:latin typeface="Noto Sans CJK KR" pitchFamily="34" charset="0"/>
-                <a:ea typeface="Noto Sans CJK KR" pitchFamily="34" charset="-122"/>
-                <a:cs typeface="Noto Sans CJK KR" pitchFamily="34" charset="-120"/>
-              </a:rPr>
-              <a:t>분모를 바꾸면 1위가 바뀝니까</a:t>
-            </a:r>
-            <a:endParaRPr lang="en-US" sz="1900" dirty="0"/>
-          </a:p>
-        </p:txBody>
-      </p:sp>
-      <p:sp>
-        <p:nvSpPr>
-          <p:cNvPr id="21" name="Shape 19"/>
+          <p:cNvPr id="18" name="Shape 16"/>
           <p:cNvSpPr/>
           <p:nvPr/>
         </p:nvSpPr>
@@ -5492,14 +5375,14 @@
       </p:sp>
       <p:sp>
         <p:nvSpPr>
-          <p:cNvPr id="22" name="Text 20"/>
+          <p:cNvPr id="19" name="Text 17"/>
           <p:cNvSpPr/>
           <p:nvPr/>
         </p:nvSpPr>
         <p:spPr>
           <a:xfrm>
             <a:off x="658368" y="3785616"/>
-            <a:ext cx="2103120" cy="438912"/>
+            <a:ext cx="2377440" cy="438912"/>
           </a:xfrm>
           <a:prstGeom prst="rect">
             <a:avLst/>
@@ -5531,14 +5414,14 @@
       </p:sp>
       <p:sp>
         <p:nvSpPr>
-          <p:cNvPr id="23" name="Text 21"/>
-          <p:cNvSpPr/>
-          <p:nvPr/>
-        </p:nvSpPr>
-        <p:spPr>
-          <a:xfrm>
-            <a:off x="2761488" y="3785616"/>
-            <a:ext cx="1005840" cy="438912"/>
+          <p:cNvPr id="20" name="Text 18"/>
+          <p:cNvSpPr/>
+          <p:nvPr/>
+        </p:nvSpPr>
+        <p:spPr>
+          <a:xfrm>
+            <a:off x="3035808" y="3785616"/>
+            <a:ext cx="4206240" cy="438912"/>
           </a:xfrm>
           <a:prstGeom prst="rect">
             <a:avLst/>
@@ -5562,7 +5445,7 @@
                 <a:ea typeface="Noto Sans CJK KR" pitchFamily="34" charset="-122"/>
                 <a:cs typeface="Noto Sans CJK KR" pitchFamily="34" charset="-120"/>
               </a:rPr>
-              <a:t>20분</a:t>
+              <a:t>민원지도 · Hotspot 표</a:t>
             </a:r>
             <a:endParaRPr lang="en-US" sz="2000" dirty="0"/>
           </a:p>
@@ -5570,30 +5453,30 @@
       </p:sp>
       <p:sp>
         <p:nvSpPr>
-          <p:cNvPr id="24" name="Text 22"/>
-          <p:cNvSpPr/>
-          <p:nvPr/>
-        </p:nvSpPr>
-        <p:spPr>
-          <a:xfrm>
-            <a:off x="3767328" y="3785616"/>
-            <a:ext cx="3931920" cy="438912"/>
-          </a:xfrm>
-          <a:prstGeom prst="rect">
-            <a:avLst/>
-          </a:prstGeom>
-          <a:noFill/>
-          <a:ln/>
-        </p:spPr>
-        <p:txBody>
-          <a:bodyPr wrap="square" rtlCol="0" anchor="ctr"/>
-          <a:lstStyle/>
-          <a:p>
-            <a:pPr indent="0" marL="0">
-              <a:buNone/>
-            </a:pPr>
-            <a:r>
-              <a:rPr lang="en-US" sz="2000" b="1" dirty="0">
+          <p:cNvPr id="21" name="Text 19"/>
+          <p:cNvSpPr/>
+          <p:nvPr/>
+        </p:nvSpPr>
+        <p:spPr>
+          <a:xfrm>
+            <a:off x="7242048" y="3785616"/>
+            <a:ext cx="4197096" cy="438912"/>
+          </a:xfrm>
+          <a:prstGeom prst="rect">
+            <a:avLst/>
+          </a:prstGeom>
+          <a:noFill/>
+          <a:ln/>
+        </p:spPr>
+        <p:txBody>
+          <a:bodyPr wrap="square" rtlCol="0" anchor="ctr"/>
+          <a:lstStyle/>
+          <a:p>
+            <a:pPr indent="0" marL="0">
+              <a:buNone/>
+            </a:pPr>
+            <a:r>
+              <a:rPr lang="en-US" sz="1900" b="1" dirty="0">
                 <a:solidFill>
                   <a:srgbClr val="64757D"/>
                 </a:solidFill>
@@ -5601,54 +5484,15 @@
                 <a:ea typeface="Noto Sans CJK KR" pitchFamily="34" charset="-122"/>
                 <a:cs typeface="Noto Sans CJK KR" pitchFamily="34" charset="-120"/>
               </a:rPr>
-              <a:t>민원지도 · Hotspot 표</a:t>
-            </a:r>
-            <a:endParaRPr lang="en-US" sz="2000" dirty="0"/>
-          </a:p>
-        </p:txBody>
-      </p:sp>
-      <p:sp>
-        <p:nvSpPr>
-          <p:cNvPr id="25" name="Text 23"/>
-          <p:cNvSpPr/>
-          <p:nvPr/>
-        </p:nvSpPr>
-        <p:spPr>
-          <a:xfrm>
-            <a:off x="7699248" y="3785616"/>
-            <a:ext cx="3739896" cy="438912"/>
-          </a:xfrm>
-          <a:prstGeom prst="rect">
-            <a:avLst/>
-          </a:prstGeom>
-          <a:noFill/>
-          <a:ln/>
-        </p:spPr>
-        <p:txBody>
-          <a:bodyPr wrap="square" rtlCol="0" anchor="ctr"/>
-          <a:lstStyle/>
-          <a:p>
-            <a:pPr indent="0" marL="0">
-              <a:buNone/>
-            </a:pPr>
-            <a:r>
-              <a:rPr lang="en-US" sz="1650" b="1" dirty="0">
-                <a:solidFill>
-                  <a:srgbClr val="64757D"/>
-                </a:solidFill>
-                <a:latin typeface="Noto Sans CJK KR" pitchFamily="34" charset="0"/>
-                <a:ea typeface="Noto Sans CJK KR" pitchFamily="34" charset="-122"/>
-                <a:cs typeface="Noto Sans CJK KR" pitchFamily="34" charset="-120"/>
-              </a:rPr>
               <a:t>CCTV가 있는데도 민원이 많은 곳은</a:t>
             </a:r>
-            <a:endParaRPr lang="en-US" sz="1650" dirty="0"/>
-          </a:p>
-        </p:txBody>
-      </p:sp>
-      <p:sp>
-        <p:nvSpPr>
-          <p:cNvPr id="26" name="Shape 24"/>
+            <a:endParaRPr lang="en-US" sz="1900" dirty="0"/>
+          </a:p>
+        </p:txBody>
+      </p:sp>
+      <p:sp>
+        <p:nvSpPr>
+          <p:cNvPr id="22" name="Shape 20"/>
           <p:cNvSpPr/>
           <p:nvPr/>
         </p:nvSpPr>
@@ -5671,14 +5515,14 @@
       </p:sp>
       <p:sp>
         <p:nvSpPr>
-          <p:cNvPr id="27" name="Text 25"/>
+          <p:cNvPr id="23" name="Text 21"/>
           <p:cNvSpPr/>
           <p:nvPr/>
         </p:nvSpPr>
         <p:spPr>
           <a:xfrm>
             <a:off x="658368" y="4407408"/>
-            <a:ext cx="2103120" cy="438912"/>
+            <a:ext cx="2377440" cy="438912"/>
           </a:xfrm>
           <a:prstGeom prst="rect">
             <a:avLst/>
@@ -5710,14 +5554,14 @@
       </p:sp>
       <p:sp>
         <p:nvSpPr>
-          <p:cNvPr id="28" name="Text 26"/>
-          <p:cNvSpPr/>
-          <p:nvPr/>
-        </p:nvSpPr>
-        <p:spPr>
-          <a:xfrm>
-            <a:off x="2761488" y="4407408"/>
-            <a:ext cx="1005840" cy="438912"/>
+          <p:cNvPr id="24" name="Text 22"/>
+          <p:cNvSpPr/>
+          <p:nvPr/>
+        </p:nvSpPr>
+        <p:spPr>
+          <a:xfrm>
+            <a:off x="3035808" y="4407408"/>
+            <a:ext cx="4206240" cy="438912"/>
           </a:xfrm>
           <a:prstGeom prst="rect">
             <a:avLst/>
@@ -5741,7 +5585,7 @@
                 <a:ea typeface="Noto Sans CJK KR" pitchFamily="34" charset="-122"/>
                 <a:cs typeface="Noto Sans CJK KR" pitchFamily="34" charset="-120"/>
               </a:rPr>
-              <a:t>20분</a:t>
+              <a:t>정책 3안 · Red Team 표</a:t>
             </a:r>
             <a:endParaRPr lang="en-US" sz="2100" dirty="0"/>
           </a:p>
@@ -5749,14 +5593,14 @@
       </p:sp>
       <p:sp>
         <p:nvSpPr>
-          <p:cNvPr id="29" name="Text 27"/>
-          <p:cNvSpPr/>
-          <p:nvPr/>
-        </p:nvSpPr>
-        <p:spPr>
-          <a:xfrm>
-            <a:off x="3767328" y="4407408"/>
-            <a:ext cx="3931920" cy="438912"/>
+          <p:cNvPr id="25" name="Text 23"/>
+          <p:cNvSpPr/>
+          <p:nvPr/>
+        </p:nvSpPr>
+        <p:spPr>
+          <a:xfrm>
+            <a:off x="7242048" y="4407408"/>
+            <a:ext cx="4197096" cy="438912"/>
           </a:xfrm>
           <a:prstGeom prst="rect">
             <a:avLst/>
@@ -5780,7 +5624,7 @@
                 <a:ea typeface="Noto Sans CJK KR" pitchFamily="34" charset="-122"/>
                 <a:cs typeface="Noto Sans CJK KR" pitchFamily="34" charset="-120"/>
               </a:rPr>
-              <a:t>정책 3안 · Red Team 표</a:t>
+              <a:t>세 안의 성격이 다릅니까</a:t>
             </a:r>
             <a:endParaRPr lang="en-US" sz="2100" dirty="0"/>
           </a:p>
@@ -5788,46 +5632,7 @@
       </p:sp>
       <p:sp>
         <p:nvSpPr>
-          <p:cNvPr id="30" name="Text 28"/>
-          <p:cNvSpPr/>
-          <p:nvPr/>
-        </p:nvSpPr>
-        <p:spPr>
-          <a:xfrm>
-            <a:off x="7699248" y="4407408"/>
-            <a:ext cx="3739896" cy="438912"/>
-          </a:xfrm>
-          <a:prstGeom prst="rect">
-            <a:avLst/>
-          </a:prstGeom>
-          <a:noFill/>
-          <a:ln/>
-        </p:spPr>
-        <p:txBody>
-          <a:bodyPr wrap="square" rtlCol="0" anchor="ctr"/>
-          <a:lstStyle/>
-          <a:p>
-            <a:pPr indent="0" marL="0">
-              <a:buNone/>
-            </a:pPr>
-            <a:r>
-              <a:rPr lang="en-US" sz="2100" b="1" dirty="0">
-                <a:solidFill>
-                  <a:srgbClr val="0B6B68"/>
-                </a:solidFill>
-                <a:latin typeface="Noto Sans CJK KR" pitchFamily="34" charset="0"/>
-                <a:ea typeface="Noto Sans CJK KR" pitchFamily="34" charset="-122"/>
-                <a:cs typeface="Noto Sans CJK KR" pitchFamily="34" charset="-120"/>
-              </a:rPr>
-              <a:t>세 안의 성격이 다릅니까</a:t>
-            </a:r>
-            <a:endParaRPr lang="en-US" sz="2100" dirty="0"/>
-          </a:p>
-        </p:txBody>
-      </p:sp>
-      <p:sp>
-        <p:nvSpPr>
-          <p:cNvPr id="31" name="Shape 29"/>
+          <p:cNvPr id="26" name="Shape 24"/>
           <p:cNvSpPr/>
           <p:nvPr/>
         </p:nvSpPr>
@@ -5850,14 +5655,14 @@
       </p:sp>
       <p:sp>
         <p:nvSpPr>
-          <p:cNvPr id="32" name="Text 30"/>
+          <p:cNvPr id="27" name="Text 25"/>
           <p:cNvSpPr/>
           <p:nvPr/>
         </p:nvSpPr>
         <p:spPr>
           <a:xfrm>
             <a:off x="658368" y="5029200"/>
-            <a:ext cx="2103120" cy="438912"/>
+            <a:ext cx="2377440" cy="438912"/>
           </a:xfrm>
           <a:prstGeom prst="rect">
             <a:avLst/>
@@ -5889,14 +5694,14 @@
       </p:sp>
       <p:sp>
         <p:nvSpPr>
-          <p:cNvPr id="33" name="Text 31"/>
-          <p:cNvSpPr/>
-          <p:nvPr/>
-        </p:nvSpPr>
-        <p:spPr>
-          <a:xfrm>
-            <a:off x="2761488" y="5029200"/>
-            <a:ext cx="1005840" cy="438912"/>
+          <p:cNvPr id="28" name="Text 26"/>
+          <p:cNvSpPr/>
+          <p:nvPr/>
+        </p:nvSpPr>
+        <p:spPr>
+          <a:xfrm>
+            <a:off x="3035808" y="5029200"/>
+            <a:ext cx="4206240" cy="438912"/>
           </a:xfrm>
           <a:prstGeom prst="rect">
             <a:avLst/>
@@ -5920,7 +5725,7 @@
                 <a:ea typeface="Noto Sans CJK KR" pitchFamily="34" charset="-122"/>
                 <a:cs typeface="Noto Sans CJK KR" pitchFamily="34" charset="-120"/>
               </a:rPr>
-              <a:t>20분</a:t>
+              <a:t>1페이지 보고 · 검증표</a:t>
             </a:r>
             <a:endParaRPr lang="en-US" sz="2000" dirty="0"/>
           </a:p>
@@ -5928,14 +5733,14 @@
       </p:sp>
       <p:sp>
         <p:nvSpPr>
-          <p:cNvPr id="34" name="Text 32"/>
-          <p:cNvSpPr/>
-          <p:nvPr/>
-        </p:nvSpPr>
-        <p:spPr>
-          <a:xfrm>
-            <a:off x="3767328" y="5029200"/>
-            <a:ext cx="3931920" cy="438912"/>
+          <p:cNvPr id="29" name="Text 27"/>
+          <p:cNvSpPr/>
+          <p:nvPr/>
+        </p:nvSpPr>
+        <p:spPr>
+          <a:xfrm>
+            <a:off x="7242048" y="5029200"/>
+            <a:ext cx="4197096" cy="438912"/>
           </a:xfrm>
           <a:prstGeom prst="rect">
             <a:avLst/>
@@ -5959,7 +5764,7 @@
                 <a:ea typeface="Noto Sans CJK KR" pitchFamily="34" charset="-122"/>
                 <a:cs typeface="Noto Sans CJK KR" pitchFamily="34" charset="-120"/>
               </a:rPr>
-              <a:t>1페이지 보고 · 검증표</a:t>
+              <a:t>세 형식의 숫자가 같습니까</a:t>
             </a:r>
             <a:endParaRPr lang="en-US" sz="2000" dirty="0"/>
           </a:p>
@@ -5967,46 +5772,7 @@
       </p:sp>
       <p:sp>
         <p:nvSpPr>
-          <p:cNvPr id="35" name="Text 33"/>
-          <p:cNvSpPr/>
-          <p:nvPr/>
-        </p:nvSpPr>
-        <p:spPr>
-          <a:xfrm>
-            <a:off x="7699248" y="5029200"/>
-            <a:ext cx="3739896" cy="438912"/>
-          </a:xfrm>
-          <a:prstGeom prst="rect">
-            <a:avLst/>
-          </a:prstGeom>
-          <a:noFill/>
-          <a:ln/>
-        </p:spPr>
-        <p:txBody>
-          <a:bodyPr wrap="square" rtlCol="0" anchor="ctr"/>
-          <a:lstStyle/>
-          <a:p>
-            <a:pPr indent="0" marL="0">
-              <a:buNone/>
-            </a:pPr>
-            <a:r>
-              <a:rPr lang="en-US" sz="2000" b="1" dirty="0">
-                <a:solidFill>
-                  <a:srgbClr val="64757D"/>
-                </a:solidFill>
-                <a:latin typeface="Noto Sans CJK KR" pitchFamily="34" charset="0"/>
-                <a:ea typeface="Noto Sans CJK KR" pitchFamily="34" charset="-122"/>
-                <a:cs typeface="Noto Sans CJK KR" pitchFamily="34" charset="-120"/>
-              </a:rPr>
-              <a:t>세 형식의 숫자가 같습니까</a:t>
-            </a:r>
-            <a:endParaRPr lang="en-US" sz="2000" dirty="0"/>
-          </a:p>
-        </p:txBody>
-      </p:sp>
-      <p:sp>
-        <p:nvSpPr>
-          <p:cNvPr id="36" name="Shape 34"/>
+          <p:cNvPr id="30" name="Shape 28"/>
           <p:cNvSpPr/>
           <p:nvPr/>
         </p:nvSpPr>
@@ -6029,7 +5795,7 @@
       </p:sp>
       <p:sp>
         <p:nvSpPr>
-          <p:cNvPr id="37" name="Text 35"/>
+          <p:cNvPr id="31" name="Text 29"/>
           <p:cNvSpPr/>
           <p:nvPr/>
         </p:nvSpPr>
@@ -9545,7 +9311,7 @@
                 <a:ea typeface="Noto Sans CJK KR" pitchFamily="34" charset="-122"/>
                 <a:cs typeface="Noto Sans CJK KR" pitchFamily="34" charset="-120"/>
               </a:rPr>
-              <a:t>연습 90분 · 프롬프트 12 · 제출물 5</a:t>
+              <a:t>프롬프트 12 · 블록 5 · 제출물 5</a:t>
             </a:r>
             <a:endParaRPr lang="en-US" sz="1800" dirty="0"/>
           </a:p>
@@ -9584,7 +9350,7 @@
                 <a:ea typeface="Noto Sans CJK KR" pitchFamily="34" charset="-122"/>
                 <a:cs typeface="Noto Sans CJK KR" pitchFamily="34" charset="-120"/>
               </a:rPr>
-              <a:t>다음 — 캡스톤 60~75분</a:t>
+              <a:t>다음 — 캡스톤</a:t>
             </a:r>
             <a:endParaRPr lang="en-US" sz="1800" dirty="0"/>
           </a:p>
@@ -10462,7 +10228,7 @@
                 <a:ea typeface="Noto Sans CJK KR" pitchFamily="34" charset="-122"/>
                 <a:cs typeface="Noto Sans CJK KR" pitchFamily="34" charset="-120"/>
               </a:rPr>
-              <a:t>제출물 · 체크포인트 · 시간 배분</a:t>
+              <a:t>제출물 · 체크포인트 · 확인 질문</a:t>
             </a:r>
             <a:endParaRPr lang="en-US" sz="1500" dirty="0"/>
           </a:p>
@@ -14491,7 +14257,7 @@
                 <a:ea typeface="Noto Sans CJK KR" pitchFamily="34" charset="-122"/>
                 <a:cs typeface="Noto Sans CJK KR" pitchFamily="34" charset="-120"/>
               </a:rPr>
-              <a:t>30분마다 산출물 하나 — 90분이면 보고서와 검산표까지 나옵니다</a:t>
+              <a:t>블록마다 산출물 하나 — 끝까지 가면 보고서와 검산표가 남습니다</a:t>
             </a:r>
             <a:endParaRPr lang="en-US" sz="2000" dirty="0"/>
           </a:p>
@@ -15833,7 +15599,7 @@
                 <a:ea typeface="Noto Sans CJK KR" pitchFamily="34" charset="-122"/>
                 <a:cs typeface="Noto Sans CJK KR" pitchFamily="34" charset="-120"/>
               </a:rPr>
-              <a:t>00:00–00:25 · 확인 질문 — 원본 파일이 하나도 바뀌지 않았습니까?</a:t>
+              <a:t>확인 질문 — 원본 파일이 하나도 바뀌지 않았습니까?</a:t>
             </a:r>
             <a:endParaRPr lang="en-US" sz="2100" dirty="0"/>
           </a:p>
@@ -17136,7 +16902,7 @@
                 <a:ea typeface="Noto Sans CJK KR" pitchFamily="34" charset="-122"/>
                 <a:cs typeface="Noto Sans CJK KR" pitchFamily="34" charset="-120"/>
               </a:rPr>
-              <a:t>00:25–00:50 · 확인 질문 — 건수 1위와 인구 1만명당 1위가 같은 동입니까?</a:t>
+              <a:t>확인 질문 — 건수 1위와 인구 1만명당 1위가 같은 동입니까?</a:t>
             </a:r>
             <a:endParaRPr lang="en-US" sz="2100" dirty="0"/>
           </a:p>
@@ -17874,7 +17640,7 @@
                 <a:ea typeface="Noto Sans CJK KR" pitchFamily="34" charset="-122"/>
                 <a:cs typeface="Noto Sans CJK KR" pitchFamily="34" charset="-120"/>
               </a:rPr>
-              <a:t>00:50–01:10 · 확인 질문 — CCTV가 있는데도 민원이 많은 곳을 찾았습니까?</a:t>
+              <a:t>확인 질문 — CCTV가 있는데도 민원이 많은 곳을 찾았습니까?</a:t>
             </a:r>
             <a:endParaRPr lang="en-US" sz="2100" dirty="0"/>
           </a:p>
